--- a/slides/00-CourseIntroduction_Summer.pptx
+++ b/slides/00-CourseIntroduction_Summer.pptx
@@ -223,7 +223,7 @@
           <a:p>
             <a:fld id="{C5B45307-6ED4-B142-BD64-10F739779302}" type="datetimeFigureOut">
               <a:rPr lang="en-US" smtClean="0"/>
-              <a:t>7/6/26</a:t>
+              <a:t>7/13/26</a:t>
             </a:fld>
             <a:endParaRPr lang="en-US"/>
           </a:p>
@@ -726,7 +726,7 @@
           <a:noFill/>
           <a:extLst>
             <a:ext uri="{909E8E84-426E-40dd-AFC4-6F175D3DCCD1}">
-              <a14:hiddenFill xmlns:a14="http://schemas.microsoft.com/office/drawing/2010/main" xmlns="">
+              <a14:hiddenFill xmlns="" xmlns:a14="http://schemas.microsoft.com/office/drawing/2010/main">
                 <a:solidFill>
                   <a:srgbClr val="FFFFFF"/>
                 </a:solidFill>
@@ -785,7 +785,7 @@
             </a:ln>
             <a:extLst>
               <a:ext uri="{91240B29-F687-4f45-9708-019B960494DF}">
-                <a14:hiddenLine xmlns:a14="http://schemas.microsoft.com/office/drawing/2010/main" xmlns="" w="9525">
+                <a14:hiddenLine xmlns="" xmlns:a14="http://schemas.microsoft.com/office/drawing/2010/main" w="9525">
                   <a:solidFill>
                     <a:srgbClr val="000000"/>
                   </a:solidFill>
@@ -875,7 +875,7 @@
             </a:ln>
             <a:extLst>
               <a:ext uri="{91240B29-F687-4f45-9708-019B960494DF}">
-                <a14:hiddenLine xmlns:a14="http://schemas.microsoft.com/office/drawing/2010/main" xmlns="" w="9525">
+                <a14:hiddenLine xmlns="" xmlns:a14="http://schemas.microsoft.com/office/drawing/2010/main" w="9525">
                   <a:solidFill>
                     <a:srgbClr val="000000"/>
                   </a:solidFill>
@@ -965,7 +965,7 @@
             </a:ln>
             <a:extLst>
               <a:ext uri="{91240B29-F687-4f45-9708-019B960494DF}">
-                <a14:hiddenLine xmlns:a14="http://schemas.microsoft.com/office/drawing/2010/main" xmlns="" w="9525">
+                <a14:hiddenLine xmlns="" xmlns:a14="http://schemas.microsoft.com/office/drawing/2010/main" w="9525">
                   <a:solidFill>
                     <a:srgbClr val="000000"/>
                   </a:solidFill>
@@ -999,7 +999,7 @@
             </a:ln>
             <a:extLst>
               <a:ext uri="{91240B29-F687-4f45-9708-019B960494DF}">
-                <a14:hiddenLine xmlns:a14="http://schemas.microsoft.com/office/drawing/2010/main" xmlns="" w="9525">
+                <a14:hiddenLine xmlns="" xmlns:a14="http://schemas.microsoft.com/office/drawing/2010/main" w="9525">
                   <a:solidFill>
                     <a:srgbClr val="000000"/>
                   </a:solidFill>
@@ -1089,7 +1089,7 @@
             </a:ln>
             <a:extLst>
               <a:ext uri="{91240B29-F687-4f45-9708-019B960494DF}">
-                <a14:hiddenLine xmlns:a14="http://schemas.microsoft.com/office/drawing/2010/main" xmlns="" w="9525">
+                <a14:hiddenLine xmlns="" xmlns:a14="http://schemas.microsoft.com/office/drawing/2010/main" w="9525">
                   <a:solidFill>
                     <a:srgbClr val="000000"/>
                   </a:solidFill>
@@ -1151,7 +1151,7 @@
             </a:ln>
             <a:extLst>
               <a:ext uri="{91240B29-F687-4f45-9708-019B960494DF}">
-                <a14:hiddenLine xmlns:a14="http://schemas.microsoft.com/office/drawing/2010/main" xmlns="" w="9525">
+                <a14:hiddenLine xmlns="" xmlns:a14="http://schemas.microsoft.com/office/drawing/2010/main" w="9525">
                   <a:solidFill>
                     <a:srgbClr val="000000"/>
                   </a:solidFill>
@@ -1213,7 +1213,7 @@
             </a:ln>
             <a:extLst>
               <a:ext uri="{91240B29-F687-4f45-9708-019B960494DF}">
-                <a14:hiddenLine xmlns:a14="http://schemas.microsoft.com/office/drawing/2010/main" xmlns="" w="9525">
+                <a14:hiddenLine xmlns="" xmlns:a14="http://schemas.microsoft.com/office/drawing/2010/main" w="9525">
                   <a:solidFill>
                     <a:srgbClr val="000000"/>
                   </a:solidFill>
@@ -1303,7 +1303,7 @@
             </a:ln>
             <a:extLst>
               <a:ext uri="{91240B29-F687-4f45-9708-019B960494DF}">
-                <a14:hiddenLine xmlns:a14="http://schemas.microsoft.com/office/drawing/2010/main" xmlns="" w="9525">
+                <a14:hiddenLine xmlns="" xmlns:a14="http://schemas.microsoft.com/office/drawing/2010/main" w="9525">
                   <a:solidFill>
                     <a:srgbClr val="000000"/>
                   </a:solidFill>
@@ -1365,7 +1365,7 @@
             </a:ln>
             <a:extLst>
               <a:ext uri="{91240B29-F687-4f45-9708-019B960494DF}">
-                <a14:hiddenLine xmlns:a14="http://schemas.microsoft.com/office/drawing/2010/main" xmlns="" w="9525">
+                <a14:hiddenLine xmlns="" xmlns:a14="http://schemas.microsoft.com/office/drawing/2010/main" w="9525">
                   <a:solidFill>
                     <a:srgbClr val="000000"/>
                   </a:solidFill>
@@ -1427,7 +1427,7 @@
             </a:ln>
             <a:extLst>
               <a:ext uri="{91240B29-F687-4f45-9708-019B960494DF}">
-                <a14:hiddenLine xmlns:a14="http://schemas.microsoft.com/office/drawing/2010/main" xmlns="" w="9525">
+                <a14:hiddenLine xmlns="" xmlns:a14="http://schemas.microsoft.com/office/drawing/2010/main" w="9525">
                   <a:solidFill>
                     <a:srgbClr val="000000"/>
                   </a:solidFill>
@@ -1517,7 +1517,7 @@
             </a:ln>
             <a:extLst>
               <a:ext uri="{91240B29-F687-4f45-9708-019B960494DF}">
-                <a14:hiddenLine xmlns:a14="http://schemas.microsoft.com/office/drawing/2010/main" xmlns="" w="9525">
+                <a14:hiddenLine xmlns="" xmlns:a14="http://schemas.microsoft.com/office/drawing/2010/main" w="9525">
                   <a:solidFill>
                     <a:srgbClr val="000000"/>
                   </a:solidFill>
@@ -1607,7 +1607,7 @@
             </a:ln>
             <a:extLst>
               <a:ext uri="{91240B29-F687-4f45-9708-019B960494DF}">
-                <a14:hiddenLine xmlns:a14="http://schemas.microsoft.com/office/drawing/2010/main" xmlns="" w="9525">
+                <a14:hiddenLine xmlns="" xmlns:a14="http://schemas.microsoft.com/office/drawing/2010/main" w="9525">
                   <a:solidFill>
                     <a:srgbClr val="000000"/>
                   </a:solidFill>
@@ -1669,7 +1669,7 @@
             </a:ln>
             <a:extLst>
               <a:ext uri="{91240B29-F687-4f45-9708-019B960494DF}">
-                <a14:hiddenLine xmlns:a14="http://schemas.microsoft.com/office/drawing/2010/main" xmlns="" w="9525">
+                <a14:hiddenLine xmlns="" xmlns:a14="http://schemas.microsoft.com/office/drawing/2010/main" w="9525">
                   <a:solidFill>
                     <a:srgbClr val="000000"/>
                   </a:solidFill>
@@ -1779,7 +1779,7 @@
             </a:ln>
             <a:extLst>
               <a:ext uri="{91240B29-F687-4f45-9708-019B960494DF}">
-                <a14:hiddenLine xmlns:a14="http://schemas.microsoft.com/office/drawing/2010/main" xmlns="" w="9525">
+                <a14:hiddenLine xmlns="" xmlns:a14="http://schemas.microsoft.com/office/drawing/2010/main" w="9525">
                   <a:solidFill>
                     <a:srgbClr val="000000"/>
                   </a:solidFill>
@@ -1841,7 +1841,7 @@
             </a:ln>
             <a:extLst>
               <a:ext uri="{91240B29-F687-4f45-9708-019B960494DF}">
-                <a14:hiddenLine xmlns:a14="http://schemas.microsoft.com/office/drawing/2010/main" xmlns="" w="9525">
+                <a14:hiddenLine xmlns="" xmlns:a14="http://schemas.microsoft.com/office/drawing/2010/main" w="9525">
                   <a:solidFill>
                     <a:srgbClr val="000000"/>
                   </a:solidFill>
@@ -1931,7 +1931,7 @@
             </a:ln>
             <a:extLst>
               <a:ext uri="{91240B29-F687-4f45-9708-019B960494DF}">
-                <a14:hiddenLine xmlns:a14="http://schemas.microsoft.com/office/drawing/2010/main" xmlns="" w="9525">
+                <a14:hiddenLine xmlns="" xmlns:a14="http://schemas.microsoft.com/office/drawing/2010/main" w="9525">
                   <a:solidFill>
                     <a:srgbClr val="000000"/>
                   </a:solidFill>
@@ -2021,7 +2021,7 @@
             </a:ln>
             <a:extLst>
               <a:ext uri="{91240B29-F687-4f45-9708-019B960494DF}">
-                <a14:hiddenLine xmlns:a14="http://schemas.microsoft.com/office/drawing/2010/main" xmlns="" w="9525">
+                <a14:hiddenLine xmlns="" xmlns:a14="http://schemas.microsoft.com/office/drawing/2010/main" w="9525">
                   <a:solidFill>
                     <a:srgbClr val="000000"/>
                   </a:solidFill>
@@ -2083,7 +2083,7 @@
             </a:ln>
             <a:extLst>
               <a:ext uri="{91240B29-F687-4f45-9708-019B960494DF}">
-                <a14:hiddenLine xmlns:a14="http://schemas.microsoft.com/office/drawing/2010/main" xmlns="" w="9525">
+                <a14:hiddenLine xmlns="" xmlns:a14="http://schemas.microsoft.com/office/drawing/2010/main" w="9525">
                   <a:solidFill>
                     <a:srgbClr val="000000"/>
                   </a:solidFill>
@@ -2173,7 +2173,7 @@
             </a:ln>
             <a:extLst>
               <a:ext uri="{91240B29-F687-4f45-9708-019B960494DF}">
-                <a14:hiddenLine xmlns:a14="http://schemas.microsoft.com/office/drawing/2010/main" xmlns="" w="9525">
+                <a14:hiddenLine xmlns="" xmlns:a14="http://schemas.microsoft.com/office/drawing/2010/main" w="9525">
                   <a:solidFill>
                     <a:srgbClr val="000000"/>
                   </a:solidFill>
@@ -2263,7 +2263,7 @@
             </a:ln>
             <a:extLst>
               <a:ext uri="{91240B29-F687-4f45-9708-019B960494DF}">
-                <a14:hiddenLine xmlns:a14="http://schemas.microsoft.com/office/drawing/2010/main" xmlns="" w="9525">
+                <a14:hiddenLine xmlns="" xmlns:a14="http://schemas.microsoft.com/office/drawing/2010/main" w="9525">
                   <a:solidFill>
                     <a:srgbClr val="000000"/>
                   </a:solidFill>
@@ -2319,7 +2319,7 @@
             </a:ln>
             <a:extLst>
               <a:ext uri="{91240B29-F687-4f45-9708-019B960494DF}">
-                <a14:hiddenLine xmlns:a14="http://schemas.microsoft.com/office/drawing/2010/main" xmlns="" w="9525">
+                <a14:hiddenLine xmlns="" xmlns:a14="http://schemas.microsoft.com/office/drawing/2010/main" w="9525">
                   <a:solidFill>
                     <a:srgbClr val="000000"/>
                   </a:solidFill>
@@ -2409,7 +2409,7 @@
             </a:ln>
             <a:extLst>
               <a:ext uri="{91240B29-F687-4f45-9708-019B960494DF}">
-                <a14:hiddenLine xmlns:a14="http://schemas.microsoft.com/office/drawing/2010/main" xmlns="" w="9525">
+                <a14:hiddenLine xmlns="" xmlns:a14="http://schemas.microsoft.com/office/drawing/2010/main" w="9525">
                   <a:solidFill>
                     <a:srgbClr val="000000"/>
                   </a:solidFill>
@@ -2465,7 +2465,7 @@
             </a:ln>
             <a:extLst>
               <a:ext uri="{91240B29-F687-4f45-9708-019B960494DF}">
-                <a14:hiddenLine xmlns:a14="http://schemas.microsoft.com/office/drawing/2010/main" xmlns="" w="9525">
+                <a14:hiddenLine xmlns="" xmlns:a14="http://schemas.microsoft.com/office/drawing/2010/main" w="9525">
                   <a:solidFill>
                     <a:srgbClr val="000000"/>
                   </a:solidFill>
@@ -2555,7 +2555,7 @@
             </a:ln>
             <a:extLst>
               <a:ext uri="{91240B29-F687-4f45-9708-019B960494DF}">
-                <a14:hiddenLine xmlns:a14="http://schemas.microsoft.com/office/drawing/2010/main" xmlns="" w="9525">
+                <a14:hiddenLine xmlns="" xmlns:a14="http://schemas.microsoft.com/office/drawing/2010/main" w="9525">
                   <a:solidFill>
                     <a:srgbClr val="000000"/>
                   </a:solidFill>
@@ -2623,7 +2623,7 @@
             </a:ln>
             <a:extLst>
               <a:ext uri="{91240B29-F687-4f45-9708-019B960494DF}">
-                <a14:hiddenLine xmlns:a14="http://schemas.microsoft.com/office/drawing/2010/main" xmlns="" w="9525">
+                <a14:hiddenLine xmlns="" xmlns:a14="http://schemas.microsoft.com/office/drawing/2010/main" w="9525">
                   <a:solidFill>
                     <a:srgbClr val="000000"/>
                   </a:solidFill>
@@ -2713,7 +2713,7 @@
             </a:ln>
             <a:extLst>
               <a:ext uri="{91240B29-F687-4f45-9708-019B960494DF}">
-                <a14:hiddenLine xmlns:a14="http://schemas.microsoft.com/office/drawing/2010/main" xmlns="" w="9525">
+                <a14:hiddenLine xmlns="" xmlns:a14="http://schemas.microsoft.com/office/drawing/2010/main" w="9525">
                   <a:solidFill>
                     <a:srgbClr val="000000"/>
                   </a:solidFill>
@@ -2781,7 +2781,7 @@
             </a:ln>
             <a:extLst>
               <a:ext uri="{91240B29-F687-4f45-9708-019B960494DF}">
-                <a14:hiddenLine xmlns:a14="http://schemas.microsoft.com/office/drawing/2010/main" xmlns="" w="9525">
+                <a14:hiddenLine xmlns="" xmlns:a14="http://schemas.microsoft.com/office/drawing/2010/main" w="9525">
                   <a:solidFill>
                     <a:srgbClr val="000000"/>
                   </a:solidFill>
@@ -2871,7 +2871,7 @@
             </a:ln>
             <a:extLst>
               <a:ext uri="{91240B29-F687-4f45-9708-019B960494DF}">
-                <a14:hiddenLine xmlns:a14="http://schemas.microsoft.com/office/drawing/2010/main" xmlns="" w="9525">
+                <a14:hiddenLine xmlns="" xmlns:a14="http://schemas.microsoft.com/office/drawing/2010/main" w="9525">
                   <a:solidFill>
                     <a:srgbClr val="000000"/>
                   </a:solidFill>
@@ -2905,7 +2905,7 @@
             </a:ln>
             <a:extLst>
               <a:ext uri="{91240B29-F687-4f45-9708-019B960494DF}">
-                <a14:hiddenLine xmlns:a14="http://schemas.microsoft.com/office/drawing/2010/main" xmlns="" w="9525">
+                <a14:hiddenLine xmlns="" xmlns:a14="http://schemas.microsoft.com/office/drawing/2010/main" w="9525">
                   <a:solidFill>
                     <a:srgbClr val="000000"/>
                   </a:solidFill>
@@ -2995,7 +2995,7 @@
             </a:ln>
             <a:extLst>
               <a:ext uri="{91240B29-F687-4f45-9708-019B960494DF}">
-                <a14:hiddenLine xmlns:a14="http://schemas.microsoft.com/office/drawing/2010/main" xmlns="" w="9525">
+                <a14:hiddenLine xmlns="" xmlns:a14="http://schemas.microsoft.com/office/drawing/2010/main" w="9525">
                   <a:solidFill>
                     <a:srgbClr val="000000"/>
                   </a:solidFill>
@@ -3057,7 +3057,7 @@
             </a:ln>
             <a:extLst>
               <a:ext uri="{91240B29-F687-4f45-9708-019B960494DF}">
-                <a14:hiddenLine xmlns:a14="http://schemas.microsoft.com/office/drawing/2010/main" xmlns="" w="9525">
+                <a14:hiddenLine xmlns="" xmlns:a14="http://schemas.microsoft.com/office/drawing/2010/main" w="9525">
                   <a:solidFill>
                     <a:srgbClr val="000000"/>
                   </a:solidFill>
@@ -3119,7 +3119,7 @@
             </a:ln>
             <a:extLst>
               <a:ext uri="{91240B29-F687-4f45-9708-019B960494DF}">
-                <a14:hiddenLine xmlns:a14="http://schemas.microsoft.com/office/drawing/2010/main" xmlns="" w="9525">
+                <a14:hiddenLine xmlns="" xmlns:a14="http://schemas.microsoft.com/office/drawing/2010/main" w="9525">
                   <a:solidFill>
                     <a:srgbClr val="000000"/>
                   </a:solidFill>
@@ -3209,7 +3209,7 @@
             </a:ln>
             <a:extLst>
               <a:ext uri="{91240B29-F687-4f45-9708-019B960494DF}">
-                <a14:hiddenLine xmlns:a14="http://schemas.microsoft.com/office/drawing/2010/main" xmlns="" w="9525">
+                <a14:hiddenLine xmlns="" xmlns:a14="http://schemas.microsoft.com/office/drawing/2010/main" w="9525">
                   <a:solidFill>
                     <a:srgbClr val="000000"/>
                   </a:solidFill>
@@ -3277,7 +3277,7 @@
             </a:ln>
             <a:extLst>
               <a:ext uri="{91240B29-F687-4f45-9708-019B960494DF}">
-                <a14:hiddenLine xmlns:a14="http://schemas.microsoft.com/office/drawing/2010/main" xmlns="" w="9525">
+                <a14:hiddenLine xmlns="" xmlns:a14="http://schemas.microsoft.com/office/drawing/2010/main" w="9525">
                   <a:solidFill>
                     <a:srgbClr val="000000"/>
                   </a:solidFill>
@@ -3339,7 +3339,7 @@
             </a:ln>
             <a:extLst>
               <a:ext uri="{91240B29-F687-4f45-9708-019B960494DF}">
-                <a14:hiddenLine xmlns:a14="http://schemas.microsoft.com/office/drawing/2010/main" xmlns="" w="9525">
+                <a14:hiddenLine xmlns="" xmlns:a14="http://schemas.microsoft.com/office/drawing/2010/main" w="9525">
                   <a:solidFill>
                     <a:srgbClr val="000000"/>
                   </a:solidFill>
@@ -3429,7 +3429,7 @@
             </a:ln>
             <a:extLst>
               <a:ext uri="{91240B29-F687-4f45-9708-019B960494DF}">
-                <a14:hiddenLine xmlns:a14="http://schemas.microsoft.com/office/drawing/2010/main" xmlns="" w="9525">
+                <a14:hiddenLine xmlns="" xmlns:a14="http://schemas.microsoft.com/office/drawing/2010/main" w="9525">
                   <a:solidFill>
                     <a:srgbClr val="000000"/>
                   </a:solidFill>
@@ -3491,7 +3491,7 @@
             </a:ln>
             <a:extLst>
               <a:ext uri="{91240B29-F687-4f45-9708-019B960494DF}">
-                <a14:hiddenLine xmlns:a14="http://schemas.microsoft.com/office/drawing/2010/main" xmlns="" w="9525">
+                <a14:hiddenLine xmlns="" xmlns:a14="http://schemas.microsoft.com/office/drawing/2010/main" w="9525">
                   <a:solidFill>
                     <a:srgbClr val="000000"/>
                   </a:solidFill>
@@ -3581,7 +3581,7 @@
             </a:ln>
             <a:extLst>
               <a:ext uri="{91240B29-F687-4f45-9708-019B960494DF}">
-                <a14:hiddenLine xmlns:a14="http://schemas.microsoft.com/office/drawing/2010/main" xmlns="" w="9525">
+                <a14:hiddenLine xmlns="" xmlns:a14="http://schemas.microsoft.com/office/drawing/2010/main" w="9525">
                   <a:solidFill>
                     <a:srgbClr val="000000"/>
                   </a:solidFill>
@@ -3643,7 +3643,7 @@
             </a:ln>
             <a:extLst>
               <a:ext uri="{91240B29-F687-4f45-9708-019B960494DF}">
-                <a14:hiddenLine xmlns:a14="http://schemas.microsoft.com/office/drawing/2010/main" xmlns="" w="9525">
+                <a14:hiddenLine xmlns="" xmlns:a14="http://schemas.microsoft.com/office/drawing/2010/main" w="9525">
                   <a:solidFill>
                     <a:srgbClr val="000000"/>
                   </a:solidFill>
@@ -3733,7 +3733,7 @@
             </a:ln>
             <a:extLst>
               <a:ext uri="{91240B29-F687-4f45-9708-019B960494DF}">
-                <a14:hiddenLine xmlns:a14="http://schemas.microsoft.com/office/drawing/2010/main" xmlns="" w="9525">
+                <a14:hiddenLine xmlns="" xmlns:a14="http://schemas.microsoft.com/office/drawing/2010/main" w="9525">
                   <a:solidFill>
                     <a:srgbClr val="000000"/>
                   </a:solidFill>
@@ -3767,7 +3767,7 @@
             </a:ln>
             <a:extLst>
               <a:ext uri="{91240B29-F687-4f45-9708-019B960494DF}">
-                <a14:hiddenLine xmlns:a14="http://schemas.microsoft.com/office/drawing/2010/main" xmlns="" w="9525">
+                <a14:hiddenLine xmlns="" xmlns:a14="http://schemas.microsoft.com/office/drawing/2010/main" w="9525">
                   <a:solidFill>
                     <a:srgbClr val="000000"/>
                   </a:solidFill>
@@ -3832,7 +3832,7 @@
             </a:ln>
             <a:extLst>
               <a:ext uri="{91240B29-F687-4f45-9708-019B960494DF}">
-                <a14:hiddenLine xmlns:a14="http://schemas.microsoft.com/office/drawing/2010/main" xmlns="" w="9525">
+                <a14:hiddenLine xmlns="" xmlns:a14="http://schemas.microsoft.com/office/drawing/2010/main" w="9525">
                   <a:solidFill>
                     <a:srgbClr val="000000"/>
                   </a:solidFill>
@@ -3922,7 +3922,7 @@
             </a:ln>
             <a:extLst>
               <a:ext uri="{91240B29-F687-4f45-9708-019B960494DF}">
-                <a14:hiddenLine xmlns:a14="http://schemas.microsoft.com/office/drawing/2010/main" xmlns="" w="9525">
+                <a14:hiddenLine xmlns="" xmlns:a14="http://schemas.microsoft.com/office/drawing/2010/main" w="9525">
                   <a:solidFill>
                     <a:srgbClr val="000000"/>
                   </a:solidFill>
@@ -3984,7 +3984,7 @@
             </a:ln>
             <a:extLst>
               <a:ext uri="{91240B29-F687-4f45-9708-019B960494DF}">
-                <a14:hiddenLine xmlns:a14="http://schemas.microsoft.com/office/drawing/2010/main" xmlns="" w="9525">
+                <a14:hiddenLine xmlns="" xmlns:a14="http://schemas.microsoft.com/office/drawing/2010/main" w="9525">
                   <a:solidFill>
                     <a:srgbClr val="000000"/>
                   </a:solidFill>
@@ -4074,7 +4074,7 @@
             </a:ln>
             <a:extLst>
               <a:ext uri="{91240B29-F687-4f45-9708-019B960494DF}">
-                <a14:hiddenLine xmlns:a14="http://schemas.microsoft.com/office/drawing/2010/main" xmlns="" w="9525">
+                <a14:hiddenLine xmlns="" xmlns:a14="http://schemas.microsoft.com/office/drawing/2010/main" w="9525">
                   <a:solidFill>
                     <a:srgbClr val="000000"/>
                   </a:solidFill>
@@ -4164,7 +4164,7 @@
             </a:ln>
             <a:extLst>
               <a:ext uri="{91240B29-F687-4f45-9708-019B960494DF}">
-                <a14:hiddenLine xmlns:a14="http://schemas.microsoft.com/office/drawing/2010/main" xmlns="" w="9525">
+                <a14:hiddenLine xmlns="" xmlns:a14="http://schemas.microsoft.com/office/drawing/2010/main" w="9525">
                   <a:solidFill>
                     <a:srgbClr val="000000"/>
                   </a:solidFill>
@@ -4229,7 +4229,7 @@
             </a:ln>
             <a:extLst>
               <a:ext uri="{91240B29-F687-4f45-9708-019B960494DF}">
-                <a14:hiddenLine xmlns:a14="http://schemas.microsoft.com/office/drawing/2010/main" xmlns="" w="9525">
+                <a14:hiddenLine xmlns="" xmlns:a14="http://schemas.microsoft.com/office/drawing/2010/main" w="9525">
                   <a:solidFill>
                     <a:srgbClr val="000000"/>
                   </a:solidFill>
@@ -4291,7 +4291,7 @@
             </a:ln>
             <a:extLst>
               <a:ext uri="{91240B29-F687-4f45-9708-019B960494DF}">
-                <a14:hiddenLine xmlns:a14="http://schemas.microsoft.com/office/drawing/2010/main" xmlns="" w="9525">
+                <a14:hiddenLine xmlns="" xmlns:a14="http://schemas.microsoft.com/office/drawing/2010/main" w="9525">
                   <a:solidFill>
                     <a:srgbClr val="000000"/>
                   </a:solidFill>
@@ -4381,7 +4381,7 @@
             </a:ln>
             <a:extLst>
               <a:ext uri="{91240B29-F687-4f45-9708-019B960494DF}">
-                <a14:hiddenLine xmlns:a14="http://schemas.microsoft.com/office/drawing/2010/main" xmlns="" w="9525">
+                <a14:hiddenLine xmlns="" xmlns:a14="http://schemas.microsoft.com/office/drawing/2010/main" w="9525">
                   <a:solidFill>
                     <a:srgbClr val="000000"/>
                   </a:solidFill>
@@ -4471,7 +4471,7 @@
             </a:ln>
             <a:extLst>
               <a:ext uri="{91240B29-F687-4f45-9708-019B960494DF}">
-                <a14:hiddenLine xmlns:a14="http://schemas.microsoft.com/office/drawing/2010/main" xmlns="" w="9525">
+                <a14:hiddenLine xmlns="" xmlns:a14="http://schemas.microsoft.com/office/drawing/2010/main" w="9525">
                   <a:solidFill>
                     <a:srgbClr val="000000"/>
                   </a:solidFill>
@@ -4533,7 +4533,7 @@
             </a:ln>
             <a:extLst>
               <a:ext uri="{91240B29-F687-4f45-9708-019B960494DF}">
-                <a14:hiddenLine xmlns:a14="http://schemas.microsoft.com/office/drawing/2010/main" xmlns="" w="9525">
+                <a14:hiddenLine xmlns="" xmlns:a14="http://schemas.microsoft.com/office/drawing/2010/main" w="9525">
                   <a:solidFill>
                     <a:srgbClr val="000000"/>
                   </a:solidFill>
@@ -4653,7 +4653,7 @@
             </a:ln>
             <a:extLst>
               <a:ext uri="{91240B29-F687-4f45-9708-019B960494DF}">
-                <a14:hiddenLine xmlns:a14="http://schemas.microsoft.com/office/drawing/2010/main" xmlns="" w="9525">
+                <a14:hiddenLine xmlns="" xmlns:a14="http://schemas.microsoft.com/office/drawing/2010/main" w="9525">
                   <a:solidFill>
                     <a:srgbClr val="000000"/>
                   </a:solidFill>
@@ -4721,7 +4721,7 @@
             </a:ln>
             <a:extLst>
               <a:ext uri="{91240B29-F687-4f45-9708-019B960494DF}">
-                <a14:hiddenLine xmlns:a14="http://schemas.microsoft.com/office/drawing/2010/main" xmlns="" w="9525">
+                <a14:hiddenLine xmlns="" xmlns:a14="http://schemas.microsoft.com/office/drawing/2010/main" w="9525">
                   <a:solidFill>
                     <a:srgbClr val="000000"/>
                   </a:solidFill>
@@ -4811,7 +4811,7 @@
             </a:ln>
             <a:extLst>
               <a:ext uri="{91240B29-F687-4f45-9708-019B960494DF}">
-                <a14:hiddenLine xmlns:a14="http://schemas.microsoft.com/office/drawing/2010/main" xmlns="" w="9525">
+                <a14:hiddenLine xmlns="" xmlns:a14="http://schemas.microsoft.com/office/drawing/2010/main" w="9525">
                   <a:solidFill>
                     <a:srgbClr val="000000"/>
                   </a:solidFill>
@@ -4951,7 +4951,7 @@
           <a:p>
             <a:fld id="{402D7A8C-E8C9-C044-B17F-4F3BDC02CA13}" type="datetime1">
               <a:rPr lang="en-US" smtClean="0"/>
-              <a:t>7/6/26</a:t>
+              <a:t>7/13/26</a:t>
             </a:fld>
             <a:endParaRPr lang="en-US"/>
           </a:p>
@@ -5218,7 +5218,7 @@
           <a:p>
             <a:fld id="{37F8A4E9-907E-024F-942D-1027DBDB6B95}" type="datetime1">
               <a:rPr lang="en-US" smtClean="0"/>
-              <a:t>7/6/26</a:t>
+              <a:t>7/13/26</a:t>
             </a:fld>
             <a:endParaRPr lang="en-US"/>
           </a:p>
@@ -5414,7 +5414,7 @@
           <a:p>
             <a:fld id="{0FE75626-F07C-1141-9EC1-D81C02E85261}" type="datetime1">
               <a:rPr lang="en-US" smtClean="0"/>
-              <a:t>7/6/26</a:t>
+              <a:t>7/13/26</a:t>
             </a:fld>
             <a:endParaRPr lang="en-US"/>
           </a:p>
@@ -5677,7 +5677,7 @@
           <a:p>
             <a:fld id="{A542032B-A565-A745-AD03-A3A1AE898D44}" type="datetime1">
               <a:rPr lang="en-US" smtClean="0"/>
-              <a:t>7/6/26</a:t>
+              <a:t>7/13/26</a:t>
             </a:fld>
             <a:endParaRPr lang="en-US"/>
           </a:p>
@@ -6111,7 +6111,7 @@
           <a:p>
             <a:fld id="{D07DFA05-D8BC-F743-AAC8-830078F9EC2E}" type="datetime1">
               <a:rPr lang="en-US" smtClean="0"/>
-              <a:t>7/6/26</a:t>
+              <a:t>7/13/26</a:t>
             </a:fld>
             <a:endParaRPr lang="en-US"/>
           </a:p>
@@ -6657,7 +6657,7 @@
           <a:p>
             <a:fld id="{A30ACE03-F6AA-B648-AEDA-6D288BF5F57D}" type="datetime1">
               <a:rPr lang="en-US" smtClean="0"/>
-              <a:t>7/6/26</a:t>
+              <a:t>7/13/26</a:t>
             </a:fld>
             <a:endParaRPr lang="en-US"/>
           </a:p>
@@ -7377,7 +7377,7 @@
           <a:p>
             <a:fld id="{00CC296A-FFCD-5143-BB88-7498A31860D8}" type="datetime1">
               <a:rPr lang="en-US" smtClean="0"/>
-              <a:t>7/6/26</a:t>
+              <a:t>7/13/26</a:t>
             </a:fld>
             <a:endParaRPr lang="en-US"/>
           </a:p>
@@ -7547,7 +7547,7 @@
           <a:p>
             <a:fld id="{C6A5FF73-2E33-5542-B000-2DC2E7840EBF}" type="datetime1">
               <a:rPr lang="en-US" smtClean="0"/>
-              <a:t>7/6/26</a:t>
+              <a:t>7/13/26</a:t>
             </a:fld>
             <a:endParaRPr lang="en-US"/>
           </a:p>
@@ -7727,7 +7727,7 @@
           <a:p>
             <a:fld id="{02F42606-263B-9C4F-8747-C46201865648}" type="datetime1">
               <a:rPr lang="en-US" smtClean="0"/>
-              <a:t>7/6/26</a:t>
+              <a:t>7/13/26</a:t>
             </a:fld>
             <a:endParaRPr lang="en-US"/>
           </a:p>
@@ -7897,7 +7897,7 @@
           <a:p>
             <a:fld id="{5F8D537B-242B-6E4B-B3AA-5700AD130DAB}" type="datetime1">
               <a:rPr lang="en-US" smtClean="0"/>
-              <a:t>7/6/26</a:t>
+              <a:t>7/13/26</a:t>
             </a:fld>
             <a:endParaRPr lang="en-US"/>
           </a:p>
@@ -8147,7 +8147,7 @@
           <a:p>
             <a:fld id="{7BE0DB53-1439-2E4C-8FEF-8A4982596F3C}" type="datetime1">
               <a:rPr lang="en-US" smtClean="0"/>
-              <a:t>7/6/26</a:t>
+              <a:t>7/13/26</a:t>
             </a:fld>
             <a:endParaRPr lang="en-US"/>
           </a:p>
@@ -8379,7 +8379,7 @@
           <a:p>
             <a:fld id="{DC68B4C4-E214-B54E-A5C2-DF036DC63B34}" type="datetime1">
               <a:rPr lang="en-US" smtClean="0"/>
-              <a:t>7/6/26</a:t>
+              <a:t>7/13/26</a:t>
             </a:fld>
             <a:endParaRPr lang="en-US"/>
           </a:p>
@@ -8765,7 +8765,7 @@
           <a:p>
             <a:fld id="{7FAC456D-E6B2-0642-9BEB-83D0B9BAC47F}" type="datetime1">
               <a:rPr lang="en-US" smtClean="0"/>
-              <a:t>7/6/26</a:t>
+              <a:t>7/13/26</a:t>
             </a:fld>
             <a:endParaRPr lang="en-US"/>
           </a:p>
@@ -8888,7 +8888,7 @@
           <a:p>
             <a:fld id="{16AA1968-45EA-A240-A17F-44B2A8A0BB1D}" type="datetime1">
               <a:rPr lang="en-US" smtClean="0"/>
-              <a:t>7/6/26</a:t>
+              <a:t>7/13/26</a:t>
             </a:fld>
             <a:endParaRPr lang="en-US"/>
           </a:p>
@@ -8983,7 +8983,7 @@
           <a:p>
             <a:fld id="{26CFB313-9C91-AB4A-9BD3-BE60645D454E}" type="datetime1">
               <a:rPr lang="en-US" smtClean="0"/>
-              <a:t>7/6/26</a:t>
+              <a:t>7/13/26</a:t>
             </a:fld>
             <a:endParaRPr lang="en-US"/>
           </a:p>
@@ -9232,7 +9232,7 @@
           <a:p>
             <a:fld id="{400DE57A-C1B2-FD48-B4C3-5BEA75776498}" type="datetime1">
               <a:rPr lang="en-US" smtClean="0"/>
-              <a:t>7/6/26</a:t>
+              <a:t>7/13/26</a:t>
             </a:fld>
             <a:endParaRPr lang="en-US"/>
           </a:p>
@@ -9517,7 +9517,7 @@
           <a:p>
             <a:fld id="{A982DE63-F783-CF4C-A886-D3D65D6D3AA3}" type="datetime1">
               <a:rPr lang="en-US" smtClean="0"/>
-              <a:t>7/6/26</a:t>
+              <a:t>7/13/26</a:t>
             </a:fld>
             <a:endParaRPr lang="en-US"/>
           </a:p>
@@ -9640,7 +9640,7 @@
           <a:noFill/>
           <a:extLst>
             <a:ext uri="{909E8E84-426E-40dd-AFC4-6F175D3DCCD1}">
-              <a14:hiddenFill xmlns:a14="http://schemas.microsoft.com/office/drawing/2010/main" xmlns="">
+              <a14:hiddenFill xmlns="" xmlns:a14="http://schemas.microsoft.com/office/drawing/2010/main">
                 <a:solidFill>
                   <a:srgbClr val="FFFFFF"/>
                 </a:solidFill>
@@ -9714,7 +9714,7 @@
               </a:ln>
               <a:extLst>
                 <a:ext uri="{91240B29-F687-4f45-9708-019B960494DF}">
-                  <a14:hiddenLine xmlns:a14="http://schemas.microsoft.com/office/drawing/2010/main" xmlns="" w="9525">
+                  <a14:hiddenLine xmlns="" xmlns:a14="http://schemas.microsoft.com/office/drawing/2010/main" w="9525">
                     <a:solidFill>
                       <a:srgbClr val="000000"/>
                     </a:solidFill>
@@ -9804,7 +9804,7 @@
               </a:ln>
               <a:extLst>
                 <a:ext uri="{91240B29-F687-4f45-9708-019B960494DF}">
-                  <a14:hiddenLine xmlns:a14="http://schemas.microsoft.com/office/drawing/2010/main" xmlns="" w="9525">
+                  <a14:hiddenLine xmlns="" xmlns:a14="http://schemas.microsoft.com/office/drawing/2010/main" w="9525">
                     <a:solidFill>
                       <a:srgbClr val="000000"/>
                     </a:solidFill>
@@ -9894,7 +9894,7 @@
               </a:ln>
               <a:extLst>
                 <a:ext uri="{91240B29-F687-4f45-9708-019B960494DF}">
-                  <a14:hiddenLine xmlns:a14="http://schemas.microsoft.com/office/drawing/2010/main" xmlns="" w="9525">
+                  <a14:hiddenLine xmlns="" xmlns:a14="http://schemas.microsoft.com/office/drawing/2010/main" w="9525">
                     <a:solidFill>
                       <a:srgbClr val="000000"/>
                     </a:solidFill>
@@ -9956,7 +9956,7 @@
               </a:ln>
               <a:extLst>
                 <a:ext uri="{91240B29-F687-4f45-9708-019B960494DF}">
-                  <a14:hiddenLine xmlns:a14="http://schemas.microsoft.com/office/drawing/2010/main" xmlns="" w="9525">
+                  <a14:hiddenLine xmlns="" xmlns:a14="http://schemas.microsoft.com/office/drawing/2010/main" w="9525">
                     <a:solidFill>
                       <a:srgbClr val="000000"/>
                     </a:solidFill>
@@ -10046,7 +10046,7 @@
               </a:ln>
               <a:extLst>
                 <a:ext uri="{91240B29-F687-4f45-9708-019B960494DF}">
-                  <a14:hiddenLine xmlns:a14="http://schemas.microsoft.com/office/drawing/2010/main" xmlns="" w="9525">
+                  <a14:hiddenLine xmlns="" xmlns:a14="http://schemas.microsoft.com/office/drawing/2010/main" w="9525">
                     <a:solidFill>
                       <a:srgbClr val="000000"/>
                     </a:solidFill>
@@ -10108,7 +10108,7 @@
               </a:ln>
               <a:extLst>
                 <a:ext uri="{91240B29-F687-4f45-9708-019B960494DF}">
-                  <a14:hiddenLine xmlns:a14="http://schemas.microsoft.com/office/drawing/2010/main" xmlns="" w="9525">
+                  <a14:hiddenLine xmlns="" xmlns:a14="http://schemas.microsoft.com/office/drawing/2010/main" w="9525">
                     <a:solidFill>
                       <a:srgbClr val="000000"/>
                     </a:solidFill>
@@ -10170,7 +10170,7 @@
               </a:ln>
               <a:extLst>
                 <a:ext uri="{91240B29-F687-4f45-9708-019B960494DF}">
-                  <a14:hiddenLine xmlns:a14="http://schemas.microsoft.com/office/drawing/2010/main" xmlns="" w="9525">
+                  <a14:hiddenLine xmlns="" xmlns:a14="http://schemas.microsoft.com/office/drawing/2010/main" w="9525">
                     <a:solidFill>
                       <a:srgbClr val="000000"/>
                     </a:solidFill>
@@ -10260,7 +10260,7 @@
               </a:ln>
               <a:extLst>
                 <a:ext uri="{91240B29-F687-4f45-9708-019B960494DF}">
-                  <a14:hiddenLine xmlns:a14="http://schemas.microsoft.com/office/drawing/2010/main" xmlns="" w="9525">
+                  <a14:hiddenLine xmlns="" xmlns:a14="http://schemas.microsoft.com/office/drawing/2010/main" w="9525">
                     <a:solidFill>
                       <a:srgbClr val="000000"/>
                     </a:solidFill>
@@ -10350,7 +10350,7 @@
               </a:ln>
               <a:extLst>
                 <a:ext uri="{91240B29-F687-4f45-9708-019B960494DF}">
-                  <a14:hiddenLine xmlns:a14="http://schemas.microsoft.com/office/drawing/2010/main" xmlns="" w="9525">
+                  <a14:hiddenLine xmlns="" xmlns:a14="http://schemas.microsoft.com/office/drawing/2010/main" w="9525">
                     <a:solidFill>
                       <a:srgbClr val="000000"/>
                     </a:solidFill>
@@ -10412,7 +10412,7 @@
               </a:ln>
               <a:extLst>
                 <a:ext uri="{91240B29-F687-4f45-9708-019B960494DF}">
-                  <a14:hiddenLine xmlns:a14="http://schemas.microsoft.com/office/drawing/2010/main" xmlns="" w="9525">
+                  <a14:hiddenLine xmlns="" xmlns:a14="http://schemas.microsoft.com/office/drawing/2010/main" w="9525">
                     <a:solidFill>
                       <a:srgbClr val="000000"/>
                     </a:solidFill>
@@ -10522,7 +10522,7 @@
               </a:ln>
               <a:extLst>
                 <a:ext uri="{91240B29-F687-4f45-9708-019B960494DF}">
-                  <a14:hiddenLine xmlns:a14="http://schemas.microsoft.com/office/drawing/2010/main" xmlns="" w="9525">
+                  <a14:hiddenLine xmlns="" xmlns:a14="http://schemas.microsoft.com/office/drawing/2010/main" w="9525">
                     <a:solidFill>
                       <a:srgbClr val="000000"/>
                     </a:solidFill>
@@ -10606,7 +10606,7 @@
               </a:ln>
               <a:extLst>
                 <a:ext uri="{91240B29-F687-4f45-9708-019B960494DF}">
-                  <a14:hiddenLine xmlns:a14="http://schemas.microsoft.com/office/drawing/2010/main" xmlns="" w="9525">
+                  <a14:hiddenLine xmlns="" xmlns:a14="http://schemas.microsoft.com/office/drawing/2010/main" w="9525">
                     <a:solidFill>
                       <a:srgbClr val="000000"/>
                     </a:solidFill>
@@ -10668,7 +10668,7 @@
               </a:ln>
               <a:extLst>
                 <a:ext uri="{91240B29-F687-4f45-9708-019B960494DF}">
-                  <a14:hiddenLine xmlns:a14="http://schemas.microsoft.com/office/drawing/2010/main" xmlns="" w="9525">
+                  <a14:hiddenLine xmlns="" xmlns:a14="http://schemas.microsoft.com/office/drawing/2010/main" w="9525">
                     <a:solidFill>
                       <a:srgbClr val="000000"/>
                     </a:solidFill>
@@ -10730,7 +10730,7 @@
               </a:ln>
               <a:extLst>
                 <a:ext uri="{91240B29-F687-4f45-9708-019B960494DF}">
-                  <a14:hiddenLine xmlns:a14="http://schemas.microsoft.com/office/drawing/2010/main" xmlns="" w="9525">
+                  <a14:hiddenLine xmlns="" xmlns:a14="http://schemas.microsoft.com/office/drawing/2010/main" w="9525">
                     <a:solidFill>
                       <a:srgbClr val="000000"/>
                     </a:solidFill>
@@ -10820,7 +10820,7 @@
               </a:ln>
               <a:extLst>
                 <a:ext uri="{91240B29-F687-4f45-9708-019B960494DF}">
-                  <a14:hiddenLine xmlns:a14="http://schemas.microsoft.com/office/drawing/2010/main" xmlns="" w="9525">
+                  <a14:hiddenLine xmlns="" xmlns:a14="http://schemas.microsoft.com/office/drawing/2010/main" w="9525">
                     <a:solidFill>
                       <a:srgbClr val="000000"/>
                     </a:solidFill>
@@ -10854,7 +10854,7 @@
               </a:ln>
               <a:extLst>
                 <a:ext uri="{91240B29-F687-4f45-9708-019B960494DF}">
-                  <a14:hiddenLine xmlns:a14="http://schemas.microsoft.com/office/drawing/2010/main" xmlns="" w="9525">
+                  <a14:hiddenLine xmlns="" xmlns:a14="http://schemas.microsoft.com/office/drawing/2010/main" w="9525">
                     <a:solidFill>
                       <a:srgbClr val="000000"/>
                     </a:solidFill>
@@ -10919,7 +10919,7 @@
               </a:ln>
               <a:extLst>
                 <a:ext uri="{91240B29-F687-4f45-9708-019B960494DF}">
-                  <a14:hiddenLine xmlns:a14="http://schemas.microsoft.com/office/drawing/2010/main" xmlns="" w="9525">
+                  <a14:hiddenLine xmlns="" xmlns:a14="http://schemas.microsoft.com/office/drawing/2010/main" w="9525">
                     <a:solidFill>
                       <a:srgbClr val="000000"/>
                     </a:solidFill>
@@ -11009,7 +11009,7 @@
               </a:ln>
               <a:extLst>
                 <a:ext uri="{91240B29-F687-4f45-9708-019B960494DF}">
-                  <a14:hiddenLine xmlns:a14="http://schemas.microsoft.com/office/drawing/2010/main" xmlns="" w="9525">
+                  <a14:hiddenLine xmlns="" xmlns:a14="http://schemas.microsoft.com/office/drawing/2010/main" w="9525">
                     <a:solidFill>
                       <a:srgbClr val="000000"/>
                     </a:solidFill>
@@ -11071,7 +11071,7 @@
               </a:ln>
               <a:extLst>
                 <a:ext uri="{91240B29-F687-4f45-9708-019B960494DF}">
-                  <a14:hiddenLine xmlns:a14="http://schemas.microsoft.com/office/drawing/2010/main" xmlns="" w="9525">
+                  <a14:hiddenLine xmlns="" xmlns:a14="http://schemas.microsoft.com/office/drawing/2010/main" w="9525">
                     <a:solidFill>
                       <a:srgbClr val="000000"/>
                     </a:solidFill>
@@ -11161,7 +11161,7 @@
               </a:ln>
               <a:extLst>
                 <a:ext uri="{91240B29-F687-4f45-9708-019B960494DF}">
-                  <a14:hiddenLine xmlns:a14="http://schemas.microsoft.com/office/drawing/2010/main" xmlns="" w="9525">
+                  <a14:hiddenLine xmlns="" xmlns:a14="http://schemas.microsoft.com/office/drawing/2010/main" w="9525">
                     <a:solidFill>
                       <a:srgbClr val="000000"/>
                     </a:solidFill>
@@ -11226,7 +11226,7 @@
               </a:ln>
               <a:extLst>
                 <a:ext uri="{91240B29-F687-4f45-9708-019B960494DF}">
-                  <a14:hiddenLine xmlns:a14="http://schemas.microsoft.com/office/drawing/2010/main" xmlns="" w="9525">
+                  <a14:hiddenLine xmlns="" xmlns:a14="http://schemas.microsoft.com/office/drawing/2010/main" w="9525">
                     <a:solidFill>
                       <a:srgbClr val="000000"/>
                     </a:solidFill>
@@ -11288,7 +11288,7 @@
               </a:ln>
               <a:extLst>
                 <a:ext uri="{91240B29-F687-4f45-9708-019B960494DF}">
-                  <a14:hiddenLine xmlns:a14="http://schemas.microsoft.com/office/drawing/2010/main" xmlns="" w="9525">
+                  <a14:hiddenLine xmlns="" xmlns:a14="http://schemas.microsoft.com/office/drawing/2010/main" w="9525">
                     <a:solidFill>
                       <a:srgbClr val="000000"/>
                     </a:solidFill>
@@ -11378,7 +11378,7 @@
               </a:ln>
               <a:extLst>
                 <a:ext uri="{91240B29-F687-4f45-9708-019B960494DF}">
-                  <a14:hiddenLine xmlns:a14="http://schemas.microsoft.com/office/drawing/2010/main" xmlns="" w="9525">
+                  <a14:hiddenLine xmlns="" xmlns:a14="http://schemas.microsoft.com/office/drawing/2010/main" w="9525">
                     <a:solidFill>
                       <a:srgbClr val="000000"/>
                     </a:solidFill>
@@ -11468,7 +11468,7 @@
               </a:ln>
               <a:extLst>
                 <a:ext uri="{91240B29-F687-4f45-9708-019B960494DF}">
-                  <a14:hiddenLine xmlns:a14="http://schemas.microsoft.com/office/drawing/2010/main" xmlns="" w="9525">
+                  <a14:hiddenLine xmlns="" xmlns:a14="http://schemas.microsoft.com/office/drawing/2010/main" w="9525">
                     <a:solidFill>
                       <a:srgbClr val="000000"/>
                     </a:solidFill>
@@ -11533,7 +11533,7 @@
               </a:ln>
               <a:extLst>
                 <a:ext uri="{91240B29-F687-4f45-9708-019B960494DF}">
-                  <a14:hiddenLine xmlns:a14="http://schemas.microsoft.com/office/drawing/2010/main" xmlns="" w="9525">
+                  <a14:hiddenLine xmlns="" xmlns:a14="http://schemas.microsoft.com/office/drawing/2010/main" w="9525">
                     <a:solidFill>
                       <a:srgbClr val="000000"/>
                     </a:solidFill>
@@ -11653,7 +11653,7 @@
               </a:ln>
               <a:extLst>
                 <a:ext uri="{91240B29-F687-4f45-9708-019B960494DF}">
-                  <a14:hiddenLine xmlns:a14="http://schemas.microsoft.com/office/drawing/2010/main" xmlns="" w="9525">
+                  <a14:hiddenLine xmlns="" xmlns:a14="http://schemas.microsoft.com/office/drawing/2010/main" w="9525">
                     <a:solidFill>
                       <a:srgbClr val="000000"/>
                     </a:solidFill>
@@ -11734,7 +11734,7 @@
               </a:ln>
               <a:extLst>
                 <a:ext uri="{91240B29-F687-4f45-9708-019B960494DF}">
-                  <a14:hiddenLine xmlns:a14="http://schemas.microsoft.com/office/drawing/2010/main" xmlns="" w="9525">
+                  <a14:hiddenLine xmlns="" xmlns:a14="http://schemas.microsoft.com/office/drawing/2010/main" w="9525">
                     <a:solidFill>
                       <a:srgbClr val="000000"/>
                     </a:solidFill>
@@ -11849,7 +11849,7 @@
               </a:ln>
               <a:extLst>
                 <a:ext uri="{91240B29-F687-4f45-9708-019B960494DF}">
-                  <a14:hiddenLine xmlns:a14="http://schemas.microsoft.com/office/drawing/2010/main" xmlns="" w="9525">
+                  <a14:hiddenLine xmlns="" xmlns:a14="http://schemas.microsoft.com/office/drawing/2010/main" w="9525">
                     <a:solidFill>
                       <a:srgbClr val="000000"/>
                     </a:solidFill>
@@ -11939,7 +11939,7 @@
               </a:ln>
               <a:extLst>
                 <a:ext uri="{91240B29-F687-4f45-9708-019B960494DF}">
-                  <a14:hiddenLine xmlns:a14="http://schemas.microsoft.com/office/drawing/2010/main" xmlns="" w="9525">
+                  <a14:hiddenLine xmlns="" xmlns:a14="http://schemas.microsoft.com/office/drawing/2010/main" w="9525">
                     <a:solidFill>
                       <a:srgbClr val="000000"/>
                     </a:solidFill>
@@ -12004,7 +12004,7 @@
               </a:ln>
               <a:extLst>
                 <a:ext uri="{91240B29-F687-4f45-9708-019B960494DF}">
-                  <a14:hiddenLine xmlns:a14="http://schemas.microsoft.com/office/drawing/2010/main" xmlns="" w="9525">
+                  <a14:hiddenLine xmlns="" xmlns:a14="http://schemas.microsoft.com/office/drawing/2010/main" w="9525">
                     <a:solidFill>
                       <a:srgbClr val="000000"/>
                     </a:solidFill>
@@ -12094,7 +12094,7 @@
               </a:ln>
               <a:extLst>
                 <a:ext uri="{91240B29-F687-4f45-9708-019B960494DF}">
-                  <a14:hiddenLine xmlns:a14="http://schemas.microsoft.com/office/drawing/2010/main" xmlns="" w="9525">
+                  <a14:hiddenLine xmlns="" xmlns:a14="http://schemas.microsoft.com/office/drawing/2010/main" w="9525">
                     <a:solidFill>
                       <a:srgbClr val="000000"/>
                     </a:solidFill>
@@ -12162,7 +12162,7 @@
               </a:ln>
               <a:extLst>
                 <a:ext uri="{91240B29-F687-4f45-9708-019B960494DF}">
-                  <a14:hiddenLine xmlns:a14="http://schemas.microsoft.com/office/drawing/2010/main" xmlns="" w="9525">
+                  <a14:hiddenLine xmlns="" xmlns:a14="http://schemas.microsoft.com/office/drawing/2010/main" w="9525">
                     <a:solidFill>
                       <a:srgbClr val="000000"/>
                     </a:solidFill>
@@ -12252,7 +12252,7 @@
               </a:ln>
               <a:extLst>
                 <a:ext uri="{91240B29-F687-4f45-9708-019B960494DF}">
-                  <a14:hiddenLine xmlns:a14="http://schemas.microsoft.com/office/drawing/2010/main" xmlns="" w="9525">
+                  <a14:hiddenLine xmlns="" xmlns:a14="http://schemas.microsoft.com/office/drawing/2010/main" w="9525">
                     <a:solidFill>
                       <a:srgbClr val="000000"/>
                     </a:solidFill>
@@ -12320,7 +12320,7 @@
               </a:ln>
               <a:extLst>
                 <a:ext uri="{91240B29-F687-4f45-9708-019B960494DF}">
-                  <a14:hiddenLine xmlns:a14="http://schemas.microsoft.com/office/drawing/2010/main" xmlns="" w="9525">
+                  <a14:hiddenLine xmlns="" xmlns:a14="http://schemas.microsoft.com/office/drawing/2010/main" w="9525">
                     <a:solidFill>
                       <a:srgbClr val="000000"/>
                     </a:solidFill>
@@ -12410,7 +12410,7 @@
               </a:ln>
               <a:extLst>
                 <a:ext uri="{91240B29-F687-4f45-9708-019B960494DF}">
-                  <a14:hiddenLine xmlns:a14="http://schemas.microsoft.com/office/drawing/2010/main" xmlns="" w="9525">
+                  <a14:hiddenLine xmlns="" xmlns:a14="http://schemas.microsoft.com/office/drawing/2010/main" w="9525">
                     <a:solidFill>
                       <a:srgbClr val="000000"/>
                     </a:solidFill>
@@ -12444,7 +12444,7 @@
               </a:ln>
               <a:extLst>
                 <a:ext uri="{91240B29-F687-4f45-9708-019B960494DF}">
-                  <a14:hiddenLine xmlns:a14="http://schemas.microsoft.com/office/drawing/2010/main" xmlns="" w="9525">
+                  <a14:hiddenLine xmlns="" xmlns:a14="http://schemas.microsoft.com/office/drawing/2010/main" w="9525">
                     <a:solidFill>
                       <a:srgbClr val="000000"/>
                     </a:solidFill>
@@ -12584,7 +12584,7 @@
           <a:p>
             <a:fld id="{59173DD1-A275-4445-AB1E-9DFF752BE39B}" type="datetime1">
               <a:rPr lang="en-US" smtClean="0"/>
-              <a:t>7/6/26</a:t>
+              <a:t>7/13/26</a:t>
             </a:fld>
             <a:endParaRPr lang="en-US"/>
           </a:p>
@@ -14435,37 +14435,15 @@
             <a:pPr lvl="1"/>
             <a:r>
               <a:rPr lang="en-US" i="1" dirty="0"/>
-              <a:t>3: </a:t>
-            </a:r>
-            <a:r>
-              <a:rPr lang="en-US" i="1" dirty="0" err="1"/>
-              <a:t>Tdability</a:t>
-            </a:r>
-            <a:endParaRPr lang="en-US" i="1" dirty="0"/>
+              <a:t>3: Turing Machines and Decidability</a:t>
+            </a:r>
           </a:p>
           <a:p>
             <a:pPr lvl="1"/>
             <a:r>
               <a:rPr lang="en-US" i="1" dirty="0"/>
-              <a:t>4: Complexity </a:t>
-            </a:r>
-            <a:r>
-              <a:rPr lang="en-US" i="1" dirty="0" err="1"/>
-              <a:t>uring</a:t>
-            </a:r>
-            <a:r>
-              <a:rPr lang="en-US" i="1" dirty="0"/>
-              <a:t> Machines and </a:t>
-            </a:r>
-            <a:r>
-              <a:rPr lang="en-US" i="1" dirty="0" err="1"/>
-              <a:t>DeciTheory</a:t>
-            </a:r>
-            <a:endParaRPr lang="en-US" i="1" dirty="0"/>
-          </a:p>
-          <a:p>
-            <a:pPr lvl="1"/>
-            <a:endParaRPr lang="en-US" i="1" dirty="0"/>
+              <a:t>4: Complexity Theory</a:t>
+            </a:r>
           </a:p>
           <a:p>
             <a:endParaRPr lang="en-US" i="1" dirty="0"/>
@@ -15556,7 +15534,7 @@
             </a:r>
             <a:r>
               <a:rPr lang="en-US" dirty="0"/>
-              <a:t>: 20 percent (2 percent deduction per absence)</a:t>
+              <a:t>: 20 percent (4 percent deduction per absence)</a:t>
             </a:r>
           </a:p>
           <a:p>
@@ -15675,7 +15653,7 @@
             <a:pPr algn="l"/>
             <a:r>
               <a:rPr lang="en-US" dirty="0"/>
-              <a:t>TA will have office hours around 2pm every day </a:t>
+              <a:t>TA will have office hours from 2-4 Mon – Thu (Tentatively)</a:t>
             </a:r>
           </a:p>
         </p:txBody>
